--- a/docs/EXECUTIVE_PRESENTATION.pptx
+++ b/docs/EXECUTIVE_PRESENTATION.pptx
@@ -2,7 +2,7 @@
 <file path=docProps\app.xml><?xml version="1.0" encoding="utf-8"?>
 <Properties xmlns="http://schemas.openxmlformats.org/officeDocument/2006/extended-properties">
   <Application>Microsoft PowerPoint</Application>
-  <Slides>14</Slides>
+  <Slides>8</Slides>
 </Properties>
 </file>
 
@@ -10,8 +10,8 @@
 <cp:coreProperties xmlns:cp="http://schemas.openxmlformats.org/package/2006/metadata/core-properties" xmlns:dc="http://purl.org/dc/elements/1.1/" xmlns:dcterms="http://purl.org/dc/terms/" xmlns:xsi="http://www.w3.org/2001/XMLSchema-instance">
   <dc:title>EXECUTIVE_PRESENTATION</dc:title>
   <dc:creator>ExensioReload</dc:creator>
-  <dcterms:created xsi:type="dcterms:W3CDTF">2026-05-22T02:54:15Z</dcterms:created>
-  <dcterms:modified xsi:type="dcterms:W3CDTF">2026-05-22T02:54:15Z</dcterms:modified>
+  <dcterms:created xsi:type="dcterms:W3CDTF">2026-05-25T01:31:19Z</dcterms:created>
+  <dcterms:modified xsi:type="dcterms:W3CDTF">2026-05-25T01:31:19Z</dcterms:modified>
 </cp:coreProperties>
 </file>
 
@@ -33,12 +33,6 @@
     <p:sldId id="262" r:id="rId7"/>
     <p:sldId id="263" r:id="rId8"/>
     <p:sldId id="264" r:id="rId9"/>
-    <p:sldId id="265" r:id="rId10"/>
-    <p:sldId id="266" r:id="rId11"/>
-    <p:sldId id="267" r:id="rId12"/>
-    <p:sldId id="268" r:id="rId13"/>
-    <p:sldId id="269" r:id="rId14"/>
-    <p:sldId id="270" r:id="rId15"/>
   </p:sldIdLst>
   <p:sldSz cx="9144000" cy="6858000" type="screen4x3"/>
   <p:notesSz cx="6858000" cy="9144000"/>
@@ -207,7 +201,7 @@
           <a:p>
             <a:r>
               <a:rPr lang="en-US" dirty="0"/>
-              <a:t>ExensioReload - Executive Overview</a:t>
+              <a:t>ExensioReload â€” Executive Briefing</a:t>
             </a:r>
           </a:p>
         </p:txBody>
@@ -234,529 +228,19 @@
           <a:p>
             <a:r>
               <a:rPr lang="en-US" dirty="0"/>
-              <a:t>Controlled, self-service resend of semiconductor test data across 20+ manufacturing sites</a:t>
-            </a:r>
-          </a:p>
-          <a:p>
-            <a:r>
-              <a:rPr lang="en-US" dirty="0"/>
-              <a:t>Audience: Engineering leadership, operations, IT</a:t>
-            </a:r>
-          </a:p>
-          <a:p>
-            <a:r>
-              <a:rPr lang="en-US" dirty="0"/>
-              <a:t>Version 1.0 - onsemi internal</a:t>
-            </a:r>
-          </a:p>
-        </p:txBody>
-      </p:sp>
-    </p:spTree>
-  </p:cSld>
-  <p:clrMapOvr>
-    <a:masterClrMapping/>
-  </p:clrMapOvr>
-</p:sld>
-</file>
-
-<file path=ppt\slides\slide10.xml><?xml version="1.0" encoding="utf-8"?>
-<p:sld xmlns:a="http://schemas.openxmlformats.org/drawingml/2006/main" xmlns:r="http://schemas.openxmlformats.org/officeDocument/2006/relationships" xmlns:p="http://schemas.openxmlformats.org/presentationml/2006/main">
-  <p:cSld>
-    <p:spTree>
-      <p:nvGrpSpPr>
-        <p:cNvPr id="1" name=""/>
-        <p:cNvGrpSpPr/>
-        <p:nvPr/>
-      </p:nvGrpSpPr>
-      <p:grpSpPr/>
-      <p:sp>
-        <p:nvSpPr>
-          <p:cNvPr id="2" name="Title"/>
-          <p:cNvSpPr>
-            <a:spLocks noGrp="1"/>
-          </p:cNvSpPr>
-          <p:nvPr>
-            <p:ph type="title"/>
-          </p:nvPr>
-        </p:nvSpPr>
-        <p:spPr>
-          <a:xfrm>
-            <a:off x="457200" y="274638"/>
-            <a:ext cx="8229600" cy="1143000"/>
-          </a:xfrm>
-        </p:spPr>
-        <p:txBody>
-          <a:bodyPr/>
-          <a:lstStyle/>
-          <a:p>
-            <a:r>
-              <a:rPr lang="en-US" dirty="0"/>
-              <a:t>Who uses it</a:t>
-            </a:r>
-          </a:p>
-        </p:txBody>
-      </p:sp>
-      <p:sp>
-        <p:nvSpPr>
-          <p:cNvPr id="3" name="Content"/>
-          <p:cNvSpPr>
-            <a:spLocks noGrp="1"/>
-          </p:cNvSpPr>
-          <p:nvPr>
-            <p:ph type="body"/>
-          </p:nvPr>
-        </p:nvSpPr>
-        <p:spPr>
-          <a:xfrm>
-            <a:off x="457200" y="1600200"/>
-            <a:ext cx="8229600" cy="4525963"/>
-          </a:xfrm>
-        </p:spPr>
-        <p:txBody>
-          <a:bodyPr/>
-          <a:lstStyle/>
-          <a:p>
-            <a:pPr marL="342900" indent="-342900">
-              <a:buChar char="â€¢"/>
-            </a:pPr>
-            <a:r>
-              <a:rPr lang="en-US" dirty="0"/>
-              <a:t>Test / yield engineer: resend missing CP or Exensio loads for lot/wafer/date window.</a:t>
-            </a:r>
-          </a:p>
-          <a:p>
-            <a:pPr marL="342900" indent="-342900">
-              <a:buChar char="â€¢"/>
-            </a:pPr>
-            <a:r>
-              <a:rPr lang="en-US" dirty="0"/>
-              <a:t>Site operations: track open sessions and confirm completion.</a:t>
-            </a:r>
-          </a:p>
-          <a:p>
-            <a:pPr marL="342900" indent="-342900">
-              <a:buChar char="â€¢"/>
-            </a:pPr>
-            <a:r>
-              <a:rPr lang="en-US" dirty="0"/>
-              <a:t>Platform / admin: user provisioning, SSO groups, environment configuration.</a:t>
-            </a:r>
-          </a:p>
-          <a:p>
-            <a:pPr marL="342900" indent="-342900">
-              <a:buChar char="â€¢"/>
-            </a:pPr>
-            <a:r>
-              <a:rPr lang="en-US" dirty="0"/>
-              <a:t>Leadership: dashboard health and session outcomes.</a:t>
-            </a:r>
-          </a:p>
-        </p:txBody>
-      </p:sp>
-    </p:spTree>
-  </p:cSld>
-  <p:clrMapOvr>
-    <a:masterClrMapping/>
-  </p:clrMapOvr>
-</p:sld>
-</file>
-
-<file path=ppt\slides\slide11.xml><?xml version="1.0" encoding="utf-8"?>
-<p:sld xmlns:a="http://schemas.openxmlformats.org/drawingml/2006/main" xmlns:r="http://schemas.openxmlformats.org/officeDocument/2006/relationships" xmlns:p="http://schemas.openxmlformats.org/presentationml/2006/main">
-  <p:cSld>
-    <p:spTree>
-      <p:nvGrpSpPr>
-        <p:cNvPr id="1" name=""/>
-        <p:cNvGrpSpPr/>
-        <p:nvPr/>
-      </p:nvGrpSpPr>
-      <p:grpSpPr/>
-      <p:sp>
-        <p:nvSpPr>
-          <p:cNvPr id="2" name="Title"/>
-          <p:cNvSpPr>
-            <a:spLocks noGrp="1"/>
-          </p:cNvSpPr>
-          <p:nvPr>
-            <p:ph type="title"/>
-          </p:nvPr>
-        </p:nvSpPr>
-        <p:spPr>
-          <a:xfrm>
-            <a:off x="457200" y="274638"/>
-            <a:ext cx="8229600" cy="1143000"/>
-          </a:xfrm>
-        </p:spPr>
-        <p:txBody>
-          <a:bodyPr/>
-          <a:lstStyle/>
-          <a:p>
-            <a:r>
-              <a:rPr lang="en-US" dirty="0"/>
-              <a:t>Deployment &amp; security</a:t>
-            </a:r>
-          </a:p>
-        </p:txBody>
-      </p:sp>
-      <p:sp>
-        <p:nvSpPr>
-          <p:cNvPr id="3" name="Content"/>
-          <p:cNvSpPr>
-            <a:spLocks noGrp="1"/>
-          </p:cNvSpPr>
-          <p:nvPr>
-            <p:ph type="body"/>
-          </p:nvPr>
-        </p:nvSpPr>
-        <p:spPr>
-          <a:xfrm>
-            <a:off x="457200" y="1600200"/>
-            <a:ext cx="8229600" cy="4525963"/>
-          </a:xfrm>
-        </p:spPr>
-        <p:txBody>
-          <a:bodyPr/>
-          <a:lstStyle/>
-          <a:p>
-            <a:pPr marL="342900" indent="-342900">
-              <a:buChar char="â€¢"/>
-            </a:pPr>
-            <a:r>
-              <a:rPr lang="en-US" dirty="0"/>
-              <a:t>Deployment: on-prem / internal enterprise (context path /exensioreload).</a:t>
-            </a:r>
-          </a:p>
-          <a:p>
-            <a:pPr marL="342900" indent="-342900">
-              <a:buChar char="â€¢"/>
-            </a:pPr>
-            <a:r>
-              <a:rPr lang="en-US" dirty="0"/>
-              <a:t>Authentication: local JWT + optional Microsoft Entra SSO (7-day refresh cookie).</a:t>
-            </a:r>
-          </a:p>
-          <a:p>
-            <a:pPr marL="342900" indent="-342900">
-              <a:buChar char="â€¢"/>
-            </a:pPr>
-            <a:r>
-              <a:rPr lang="en-US" dirty="0"/>
-              <a:t>Authorization: SUPER_ADMIN, ADMIN, USER with method-level security.</a:t>
-            </a:r>
-          </a:p>
-          <a:p>
-            <a:pPr marL="342900" indent="-342900">
-              <a:buChar char="â€¢"/>
-            </a:pPr>
-            <a:r>
-              <a:rPr lang="en-US" dirty="0"/>
-              <a:t>Audit: user actions, IP, and user-agent on sensitive operations.</a:t>
-            </a:r>
-          </a:p>
-        </p:txBody>
-      </p:sp>
-    </p:spTree>
-  </p:cSld>
-  <p:clrMapOvr>
-    <a:masterClrMapping/>
-  </p:clrMapOvr>
-</p:sld>
-</file>
-
-<file path=ppt\slides\slide12.xml><?xml version="1.0" encoding="utf-8"?>
-<p:sld xmlns:a="http://schemas.openxmlformats.org/drawingml/2006/main" xmlns:r="http://schemas.openxmlformats.org/officeDocument/2006/relationships" xmlns:p="http://schemas.openxmlformats.org/presentationml/2006/main">
-  <p:cSld>
-    <p:spTree>
-      <p:nvGrpSpPr>
-        <p:cNvPr id="1" name=""/>
-        <p:cNvGrpSpPr/>
-        <p:nvPr/>
-      </p:nvGrpSpPr>
-      <p:grpSpPr/>
-      <p:sp>
-        <p:nvSpPr>
-          <p:cNvPr id="2" name="Title"/>
-          <p:cNvSpPr>
-            <a:spLocks noGrp="1"/>
-          </p:cNvSpPr>
-          <p:nvPr>
-            <p:ph type="title"/>
-          </p:nvPr>
-        </p:nvSpPr>
-        <p:spPr>
-          <a:xfrm>
-            <a:off x="457200" y="274638"/>
-            <a:ext cx="8229600" cy="1143000"/>
-          </a:xfrm>
-        </p:spPr>
-        <p:txBody>
-          <a:bodyPr/>
-          <a:lstStyle/>
-          <a:p>
-            <a:r>
-              <a:rPr lang="en-US" dirty="0"/>
-              <a:t>Suggested rollout</a:t>
-            </a:r>
-          </a:p>
-        </p:txBody>
-      </p:sp>
-      <p:sp>
-        <p:nvSpPr>
-          <p:cNvPr id="3" name="Content"/>
-          <p:cNvSpPr>
-            <a:spLocks noGrp="1"/>
-          </p:cNvSpPr>
-          <p:nvPr>
-            <p:ph type="body"/>
-          </p:nvPr>
-        </p:nvSpPr>
-        <p:spPr>
-          <a:xfrm>
-            <a:off x="457200" y="1600200"/>
-            <a:ext cx="8229600" cy="4525963"/>
-          </a:xfrm>
-        </p:spPr>
-        <p:txBody>
-          <a:bodyPr/>
-          <a:lstStyle/>
-          <a:p>
-            <a:pPr marL="342900" indent="-342900">
-              <a:buChar char="â€¢"/>
-            </a:pPr>
-            <a:r>
-              <a:rPr lang="en-US" dirty="0"/>
-              <a:t>Phase 1 - Pilot: 2-3 sites, wizard + monitoring; success = fewer manual scripts/tickets.</a:t>
-            </a:r>
-          </a:p>
-          <a:p>
-            <a:pPr marL="342900" indent="-342900">
-              <a:buChar char="â€¢"/>
-            </a:pPr>
-            <a:r>
-              <a:rPr lang="en-US" dirty="0"/>
-              <a:t>Phase 2 - Expand: remaining sites, dbconnections.yml, Entra role mapping.</a:t>
-            </a:r>
-          </a:p>
-          <a:p>
-            <a:pPr marL="342900" indent="-342900">
-              <a:buChar char="â€¢"/>
-            </a:pPr>
-            <a:r>
-              <a:rPr lang="en-US" dirty="0"/>
-              <a:t>Phase 3 - Optimize: coverage analytics and dashboard KPIs; fewer duplicate resends, faster MTTR.</a:t>
-            </a:r>
-          </a:p>
-        </p:txBody>
-      </p:sp>
-    </p:spTree>
-  </p:cSld>
-  <p:clrMapOvr>
-    <a:masterClrMapping/>
-  </p:clrMapOvr>
-</p:sld>
-</file>
-
-<file path=ppt\slides\slide13.xml><?xml version="1.0" encoding="utf-8"?>
-<p:sld xmlns:a="http://schemas.openxmlformats.org/drawingml/2006/main" xmlns:r="http://schemas.openxmlformats.org/officeDocument/2006/relationships" xmlns:p="http://schemas.openxmlformats.org/presentationml/2006/main">
-  <p:cSld>
-    <p:spTree>
-      <p:nvGrpSpPr>
-        <p:cNvPr id="1" name=""/>
-        <p:cNvGrpSpPr/>
-        <p:nvPr/>
-      </p:nvGrpSpPr>
-      <p:grpSpPr/>
-      <p:sp>
-        <p:nvSpPr>
-          <p:cNvPr id="2" name="Title"/>
-          <p:cNvSpPr>
-            <a:spLocks noGrp="1"/>
-          </p:cNvSpPr>
-          <p:nvPr>
-            <p:ph type="title"/>
-          </p:nvPr>
-        </p:nvSpPr>
-        <p:spPr>
-          <a:xfrm>
-            <a:off x="457200" y="274638"/>
-            <a:ext cx="8229600" cy="1143000"/>
-          </a:xfrm>
-        </p:spPr>
-        <p:txBody>
-          <a:bodyPr/>
-          <a:lstStyle/>
-          <a:p>
-            <a:r>
-              <a:rPr lang="en-US" dirty="0"/>
-              <a:t>Bottom line</a:t>
-            </a:r>
-          </a:p>
-        </p:txBody>
-      </p:sp>
-      <p:sp>
-        <p:nvSpPr>
-          <p:cNvPr id="3" name="Content"/>
-          <p:cNvSpPr>
-            <a:spLocks noGrp="1"/>
-          </p:cNvSpPr>
-          <p:nvPr>
-            <p:ph type="body"/>
-          </p:nvPr>
-        </p:nvSpPr>
-        <p:spPr>
-          <a:xfrm>
-            <a:off x="457200" y="1600200"/>
-            <a:ext cx="8229600" cy="4525963"/>
-          </a:xfrm>
-        </p:spPr>
-        <p:txBody>
-          <a:bodyPr/>
-          <a:lstStyle/>
-          <a:p>
-            <a:r>
-              <a:rPr lang="en-US" dirty="0"/>
-              <a:t>ExensioReload turns test-data resend from a tribal, site-by-site exercise into a governed, observable factory capability.</a:t>
-            </a:r>
-          </a:p>
-          <a:p>
-            <a:r>
-              <a:rPr lang="en-US" dirty="0"/>
-              <a:t>Audit, roles, real-time status, and clear date coverage - production-grade rigor.</a:t>
-            </a:r>
-          </a:p>
-          <a:p>
-            <a:r>
-              <a:rPr lang="en-US" dirty="0"/>
-              <a:t>Ask: Sponsor site onboarding, Entra group mapping, and operational ownership.</a:t>
-            </a:r>
-          </a:p>
-        </p:txBody>
-      </p:sp>
-    </p:spTree>
-  </p:cSld>
-  <p:clrMapOvr>
-    <a:masterClrMapping/>
-  </p:clrMapOvr>
-</p:sld>
-</file>
-
-<file path=ppt\slides\slide14.xml><?xml version="1.0" encoding="utf-8"?>
-<p:sld xmlns:a="http://schemas.openxmlformats.org/drawingml/2006/main" xmlns:r="http://schemas.openxmlformats.org/officeDocument/2006/relationships" xmlns:p="http://schemas.openxmlformats.org/presentationml/2006/main">
-  <p:cSld>
-    <p:spTree>
-      <p:nvGrpSpPr>
-        <p:cNvPr id="1" name=""/>
-        <p:cNvGrpSpPr/>
-        <p:nvPr/>
-      </p:nvGrpSpPr>
-      <p:grpSpPr/>
-      <p:sp>
-        <p:nvSpPr>
-          <p:cNvPr id="2" name="Title"/>
-          <p:cNvSpPr>
-            <a:spLocks noGrp="1"/>
-          </p:cNvSpPr>
-          <p:nvPr>
-            <p:ph type="title"/>
-          </p:nvPr>
-        </p:nvSpPr>
-        <p:spPr>
-          <a:xfrm>
-            <a:off x="457200" y="274638"/>
-            <a:ext cx="8229600" cy="1143000"/>
-          </a:xfrm>
-        </p:spPr>
-        <p:txBody>
-          <a:bodyPr/>
-          <a:lstStyle/>
-          <a:p>
-            <a:r>
-              <a:rPr lang="en-US" dirty="0"/>
-              <a:t>Appendix - One-page cheat sheet</a:t>
-            </a:r>
-          </a:p>
-        </p:txBody>
-      </p:sp>
-      <p:sp>
-        <p:nvSpPr>
-          <p:cNvPr id="3" name="Content"/>
-          <p:cNvSpPr>
-            <a:spLocks noGrp="1"/>
-          </p:cNvSpPr>
-          <p:nvPr>
-            <p:ph type="body"/>
-          </p:nvPr>
-        </p:nvSpPr>
-        <p:spPr>
-          <a:xfrm>
-            <a:off x="457200" y="1600200"/>
-            <a:ext cx="8229600" cy="4525963"/>
-          </a:xfrm>
-        </p:spPr>
-        <p:txBody>
-          <a:bodyPr/>
-          <a:lstStyle/>
-          <a:p>
-            <a:pPr marL="342900" indent="-342900">
-              <a:buChar char="â€¢"/>
-            </a:pPr>
-            <a:r>
-              <a:rPr lang="en-US" dirty="0"/>
-              <a:t>PROBLEM: Manual resends, duplicates, no coverage view</a:t>
-            </a:r>
-          </a:p>
-          <a:p>
-            <a:pPr marL="342900" indent="-342900">
-              <a:buChar char="â€¢"/>
-            </a:pPr>
-            <a:r>
-              <a:rPr lang="en-US" dirty="0"/>
-              <a:t>SOLUTION: 3-step wizard + staging ledger + live monitoring</a:t>
-            </a:r>
-          </a:p>
-          <a:p>
-            <a:pPr marL="342900" indent="-342900">
-              <a:buChar char="â€¢"/>
-            </a:pPr>
-            <a:r>
-              <a:rPr lang="en-US" dirty="0"/>
-              <a:t>USERS: Engineers, ops, admins</a:t>
-            </a:r>
-          </a:p>
-          <a:p>
-            <a:pPr marL="342900" indent="-342900">
-              <a:buChar char="â€¢"/>
-            </a:pPr>
-            <a:r>
-              <a:rPr lang="en-US" dirty="0"/>
-              <a:t>INTEGRATIONS: Site Oracle, sender queues, CP/ES, Exensio (opt.)</a:t>
-            </a:r>
-          </a:p>
-          <a:p>
-            <a:pPr marL="342900" indent="-342900">
-              <a:buChar char="â€¢"/>
-            </a:pPr>
-            <a:r>
-              <a:rPr lang="en-US" dirty="0"/>
-              <a:t>SECURITY: Entra SSO, RBAC, audit trail</a:t>
-            </a:r>
-          </a:p>
-          <a:p>
-            <a:pPr marL="342900" indent="-342900">
-              <a:buChar char="â€¢"/>
-            </a:pPr>
-            <a:r>
-              <a:rPr lang="en-US" dirty="0"/>
-              <a:t>WIN: Faster MTTR, fewer duplicates, provable coverage</a:t>
-            </a:r>
-          </a:p>
-          <a:p>
-            <a:pPr marL="342900" indent="-342900">
-              <a:buChar char="â€¢"/>
-            </a:pPr>
-            <a:r>
-              <a:rPr lang="en-US" dirty="0"/>
-              <a:t>Docs: EXENSIORELOAD.md, INTEGRATION_ES_EXENSIO.md, ETL_SSH_TRIGGER.md, SSO_ONBOARDING_DETAILS.md</a:t>
+              <a:t>Leadership briefing on controlled, self-service semiconductor test-data resend across 20+ manufacturing sites</a:t>
+            </a:r>
+          </a:p>
+          <a:p>
+            <a:r>
+              <a:rPr lang="en-US" dirty="0"/>
+              <a:t>Audience: engineering leadership, operations, and IT</a:t>
+            </a:r>
+          </a:p>
+          <a:p>
+            <a:r>
+              <a:rPr lang="en-US" dirty="0"/>
+              <a:t>Goal: align on business impact, governance, and rollout</a:t>
             </a:r>
           </a:p>
         </p:txBody>
@@ -801,7 +285,7 @@
           <a:p>
             <a:r>
               <a:rPr lang="en-US" dirty="0"/>
-              <a:t>The challenge</a:t>
+              <a:t>Why it matters</a:t>
             </a:r>
           </a:p>
         </p:txBody>
@@ -831,25 +315,25 @@
             </a:pPr>
             <a:r>
               <a:rPr lang="en-US" dirty="0"/>
-              <a:t>Test data gaps and late-arriving files force teams to re-push lot/wafer payloads into downstream systems.</a:t>
-            </a:r>
-          </a:p>
-          <a:p>
-            <a:pPr marL="342900" indent="-342900">
-              <a:buChar char="â€¢"/>
-            </a:pPr>
-            <a:r>
-              <a:rPr lang="en-US" dirty="0"/>
-              <a:t>Today: manual SQL/scripts, opaque status, duplicate-send risk, slow site-specific playbooks.</a:t>
-            </a:r>
-          </a:p>
-          <a:p>
-            <a:pPr marL="342900" indent="-342900">
-              <a:buChar char="â€¢"/>
-            </a:pPr>
-            <a:r>
-              <a:rPr lang="en-US" dirty="0"/>
-              <a:t>Cost: engineer time, delayed yield decisions, repeated fire drills.</a:t>
+              <a:t>Missing or late test-data files force teams to re-push lot and wafer payloads into downstream systems.</a:t>
+            </a:r>
+          </a:p>
+          <a:p>
+            <a:pPr marL="342900" indent="-342900">
+              <a:buChar char="â€¢"/>
+            </a:pPr>
+            <a:r>
+              <a:rPr lang="en-US" dirty="0"/>
+              <a:t>Today this work is manual, opaque, and risky: SQL scripts, ticket handoffs, duplicate-send exposure, and site-specific playbooks.</a:t>
+            </a:r>
+          </a:p>
+          <a:p>
+            <a:pPr marL="342900" indent="-342900">
+              <a:buChar char="â€¢"/>
+            </a:pPr>
+            <a:r>
+              <a:rPr lang="en-US" dirty="0"/>
+              <a:t>The result is wasted engineer time, slower yield decisions, and repeated operational fire drills.</a:t>
             </a:r>
           </a:p>
         </p:txBody>
@@ -894,7 +378,7 @@
           <a:p>
             <a:r>
               <a:rPr lang="en-US" dirty="0"/>
-              <a:t>The solution</a:t>
+              <a:t>The answer</a:t>
             </a:r>
           </a:p>
         </p:txBody>
@@ -924,25 +408,25 @@
             </a:pPr>
             <a:r>
               <a:rPr lang="en-US" dirty="0"/>
-              <a:t>ExensioReload standardizes discover, stage, dispatch, and monitor for test-data resends.</a:t>
-            </a:r>
-          </a:p>
-          <a:p>
-            <a:pPr marL="342900" indent="-342900">
-              <a:buChar char="â€¢"/>
-            </a:pPr>
-            <a:r>
-              <a:rPr lang="en-US" dirty="0"/>
-              <a:t>One platform: search metadata, stage only what is needed, track every file to completion.</a:t>
-            </a:r>
-          </a:p>
-          <a:p>
-            <a:pPr marL="342900" indent="-342900">
-              <a:buChar char="â€¢"/>
-            </a:pPr>
-            <a:r>
-              <a:rPr lang="en-US" dirty="0"/>
-              <a:t>Prove coverage by site, sender, lot, and end-time date range.</a:t>
+              <a:t>ExensioReload standardizes discovery, staging, dispatch, and monitoring for test-data resends.</a:t>
+            </a:r>
+          </a:p>
+          <a:p>
+            <a:pPr marL="342900" indent="-342900">
+              <a:buChar char="â€¢"/>
+            </a:pPr>
+            <a:r>
+              <a:rPr lang="en-US" dirty="0"/>
+              <a:t>One governed platform lets teams search metadata, stage only what is needed, and track every file to completion.</a:t>
+            </a:r>
+          </a:p>
+          <a:p>
+            <a:pPr marL="342900" indent="-342900">
+              <a:buChar char="â€¢"/>
+            </a:pPr>
+            <a:r>
+              <a:rPr lang="en-US" dirty="0"/>
+              <a:t>Coverage is provable by site, sender, lot, wafer, and end-time date range.</a:t>
             </a:r>
           </a:p>
         </p:txBody>
@@ -987,7 +471,7 @@
           <a:p>
             <a:r>
               <a:rPr lang="en-US" dirty="0"/>
-              <a:t>How it works - 3 steps</a:t>
+              <a:t>How teams use it</a:t>
             </a:r>
           </a:p>
         </p:txBody>
@@ -1017,25 +501,25 @@
             </a:pPr>
             <a:r>
               <a:rPr lang="en-US" dirty="0"/>
-              <a:t>Configure: Pick environment, site, sender; filter by lot, wafer, date range, tester/data type.</a:t>
-            </a:r>
-          </a:p>
-          <a:p>
-            <a:pPr marL="342900" indent="-342900">
-              <a:buChar char="â€¢"/>
-            </a:pPr>
-            <a:r>
-              <a:rPr lang="en-US" dirty="0"/>
-              <a:t>Preview: See matching files; warnings for already-staged duplicates.</a:t>
-            </a:r>
-          </a:p>
-          <a:p>
-            <a:pPr marL="342900" indent="-342900">
-              <a:buChar char="â€¢"/>
-            </a:pPr>
-            <a:r>
-              <a:rPr lang="en-US" dirty="0"/>
-              <a:t>Monitor: Live status per file; session history, analytics, and export.</a:t>
+              <a:t>Configure: choose environment, site, sender, and the right filters for lot, wafer, dates, tester, or data type.</a:t>
+            </a:r>
+          </a:p>
+          <a:p>
+            <a:pPr marL="342900" indent="-342900">
+              <a:buChar char="â€¢"/>
+            </a:pPr>
+            <a:r>
+              <a:rPr lang="en-US" dirty="0"/>
+              <a:t>Preview: review matching files and get warnings for already-staged duplicates before dispatch.</a:t>
+            </a:r>
+          </a:p>
+          <a:p>
+            <a:pPr marL="342900" indent="-342900">
+              <a:buChar char="â€¢"/>
+            </a:pPr>
+            <a:r>
+              <a:rPr lang="en-US" dirty="0"/>
+              <a:t>Monitor: follow live file status, session history, analytics, and exports in one place.</a:t>
             </a:r>
           </a:p>
         </p:txBody>
@@ -1080,7 +564,7 @@
           <a:p>
             <a:r>
               <a:rPr lang="en-US" dirty="0"/>
-              <a:t>End-to-end data pipeline</a:t>
+              <a:t>Business impact</a:t>
             </a:r>
           </a:p>
         </p:txBody>
@@ -1110,34 +594,34 @@
             </a:pPr>
             <a:r>
               <a:rPr lang="en-US" dirty="0"/>
-              <a:t>NEW - staged from discovery</a:t>
-            </a:r>
-          </a:p>
-          <a:p>
-            <a:pPr marL="342900" indent="-342900">
-              <a:buChar char="â€¢"/>
-            </a:pPr>
-            <a:r>
-              <a:rPr lang="en-US" dirty="0"/>
-              <a:t>ENRICHMENT - dispatched to sender queue; CP success when ES enabled</a:t>
-            </a:r>
-          </a:p>
-          <a:p>
-            <a:pPr marL="342900" indent="-342900">
-              <a:buChar char="â€¢"/>
-            </a:pPr>
-            <a:r>
-              <a:rPr lang="en-US" dirty="0"/>
-              <a:t>EXENSIO_LOADING - Exensio confirms load (optional)</a:t>
-            </a:r>
-          </a:p>
-          <a:p>
-            <a:pPr marL="342900" indent="-342900">
-              <a:buChar char="â€¢"/>
-            </a:pPr>
-            <a:r>
-              <a:rPr lang="en-US" dirty="0"/>
-              <a:t>DONE / FAILED / CANCELLED - background services poll; single UI status; email on session complete</a:t>
+              <a:t>Time to resolution drops from multi-day script cycles to self-service resend in minutes.</a:t>
+            </a:r>
+          </a:p>
+          <a:p>
+            <a:pPr marL="342900" indent="-342900">
+              <a:buChar char="â€¢"/>
+            </a:pPr>
+            <a:r>
+              <a:rPr lang="en-US" dirty="0"/>
+              <a:t>Coverage clarity shows exactly which end-time ranges were resent, reducing overlap and gaps.</a:t>
+            </a:r>
+          </a:p>
+          <a:p>
+            <a:pPr marL="342900" indent="-342900">
+              <a:buChar char="â€¢"/>
+            </a:pPr>
+            <a:r>
+              <a:rPr lang="en-US" dirty="0"/>
+              <a:t>One app supports 20+ sites instead of 20 different playbooks.</a:t>
+            </a:r>
+          </a:p>
+          <a:p>
+            <a:pPr marL="342900" indent="-342900">
+              <a:buChar char="â€¢"/>
+            </a:pPr>
+            <a:r>
+              <a:rPr lang="en-US" dirty="0"/>
+              <a:t>Teams spend less time on manual recovery and more time on yield and throughput decisions.</a:t>
             </a:r>
           </a:p>
         </p:txBody>
@@ -1182,7 +666,7 @@
           <a:p>
             <a:r>
               <a:rPr lang="en-US" dirty="0"/>
-              <a:t>Operational impact</a:t>
+              <a:t>Governance and visibility</a:t>
             </a:r>
           </a:p>
         </p:txBody>
@@ -1212,34 +696,34 @@
             </a:pPr>
             <a:r>
               <a:rPr lang="en-US" dirty="0"/>
-              <a:t>Time to resolution: self-service resend in minutes, not multi-day script cycles.</a:t>
-            </a:r>
-          </a:p>
-          <a:p>
-            <a:pPr marL="342900" indent="-342900">
-              <a:buChar char="â€¢"/>
-            </a:pPr>
-            <a:r>
-              <a:rPr lang="en-US" dirty="0"/>
-              <a:t>Coverage clarity: session end-time coverage shows exactly which dates were resent.</a:t>
-            </a:r>
-          </a:p>
-          <a:p>
-            <a:pPr marL="342900" indent="-342900">
-              <a:buChar char="â€¢"/>
-            </a:pPr>
-            <a:r>
-              <a:rPr lang="en-US" dirty="0"/>
-              <a:t>Scale: one app for 20+ sites (PROD/QA), not 20 different playbooks.</a:t>
-            </a:r>
-          </a:p>
-          <a:p>
-            <a:pPr marL="342900" indent="-342900">
-              <a:buChar char="â€¢"/>
-            </a:pPr>
-            <a:r>
-              <a:rPr lang="en-US" dirty="0"/>
-              <a:t>Governance: role-based access, audit logs, duplicate detection.</a:t>
+              <a:t>Duplicate staging warnings appear before dispatch.</a:t>
+            </a:r>
+          </a:p>
+          <a:p>
+            <a:pPr marL="342900" indent="-342900">
+              <a:buChar char="â€¢"/>
+            </a:pPr>
+            <a:r>
+              <a:rPr lang="en-US" dirty="0"/>
+              <a:t>Immutable staging ledger in SENDER_STAGE captures request IDs and timestamps.</a:t>
+            </a:r>
+          </a:p>
+          <a:p>
+            <a:pPr marL="342900" indent="-342900">
+              <a:buChar char="â€¢"/>
+            </a:pPr>
+            <a:r>
+              <a:rPr lang="en-US" dirty="0"/>
+              <a:t>Dashboard and My Sessions provide live status, drill-down, charts, and export.</a:t>
+            </a:r>
+          </a:p>
+          <a:p>
+            <a:pPr marL="342900" indent="-342900">
+              <a:buChar char="â€¢"/>
+            </a:pPr>
+            <a:r>
+              <a:rPr lang="en-US" dirty="0"/>
+              <a:t>Microsoft Entra SSO and role-based access keep control aligned with enterprise policy.</a:t>
             </a:r>
           </a:p>
         </p:txBody>
@@ -1284,7 +768,7 @@
           <a:p>
             <a:r>
               <a:rPr lang="en-US" dirty="0"/>
-              <a:t>Risk reduction</a:t>
+              <a:t>Rollout path</a:t>
             </a:r>
           </a:p>
         </p:txBody>
@@ -1314,34 +798,34 @@
             </a:pPr>
             <a:r>
               <a:rPr lang="en-US" dirty="0"/>
-              <a:t>Duplicate staging warnings before dispatch.</a:t>
-            </a:r>
-          </a:p>
-          <a:p>
-            <a:pPr marL="342900" indent="-342900">
-              <a:buChar char="â€¢"/>
-            </a:pPr>
-            <a:r>
-              <a:rPr lang="en-US" dirty="0"/>
-              <a:t>Immutable staging ledger (SENDER_STAGE) with request IDs and timestamps.</a:t>
-            </a:r>
-          </a:p>
-          <a:p>
-            <a:pPr marL="342900" indent="-342900">
-              <a:buChar char="â€¢"/>
-            </a:pPr>
-            <a:r>
-              <a:rPr lang="en-US" dirty="0"/>
-              <a:t>Controlled writes to external DBs (gated by configuration).</a:t>
-            </a:r>
-          </a:p>
-          <a:p>
-            <a:pPr marL="342900" indent="-342900">
-              <a:buChar char="â€¢"/>
-            </a:pPr>
-            <a:r>
-              <a:rPr lang="en-US" dirty="0"/>
-              <a:t>Enterprise SSO (Microsoft Entra OIDC) with group-to-role mapping.</a:t>
+              <a:t>Phase 1 - Pilot: 2-3 sites with wizard and monitoring; success means fewer manual scripts and tickets.</a:t>
+            </a:r>
+          </a:p>
+          <a:p>
+            <a:pPr marL="342900" indent="-342900">
+              <a:buChar char="â€¢"/>
+            </a:pPr>
+            <a:r>
+              <a:rPr lang="en-US" dirty="0"/>
+              <a:t>Phase 2 - Expand: onboard remaining sites and complete Entra role mapping.</a:t>
+            </a:r>
+          </a:p>
+          <a:p>
+            <a:pPr marL="342900" indent="-342900">
+              <a:buChar char="â€¢"/>
+            </a:pPr>
+            <a:r>
+              <a:rPr lang="en-US" dirty="0"/>
+              <a:t>Phase 3 - Optimize: add coverage analytics and dashboard KPIs to reduce duplicate resends and MTTR.</a:t>
+            </a:r>
+          </a:p>
+          <a:p>
+            <a:pPr marL="342900" indent="-342900">
+              <a:buChar char="â€¢"/>
+            </a:pPr>
+            <a:r>
+              <a:rPr lang="en-US" dirty="0"/>
+              <a:t>Decision needed: sponsor site onboarding, Entra group mapping, and operational ownership.</a:t>
             </a:r>
           </a:p>
         </p:txBody>
@@ -1386,7 +870,7 @@
           <a:p>
             <a:r>
               <a:rPr lang="en-US" dirty="0"/>
-              <a:t>Visibility</a:t>
+              <a:t>Bottom line</a:t>
             </a:r>
           </a:p>
         </p:txBody>
@@ -1411,132 +895,21 @@
           <a:bodyPr/>
           <a:lstStyle/>
           <a:p>
-            <a:pPr marL="342900" indent="-342900">
-              <a:buChar char="â€¢"/>
-            </a:pPr>
-            <a:r>
-              <a:rPr lang="en-US" dirty="0"/>
-              <a:t>Dashboard: staged / ready / in-flight / done / failed across sites (auto-refresh).</a:t>
-            </a:r>
-          </a:p>
-          <a:p>
-            <a:pPr marL="342900" indent="-342900">
-              <a:buChar char="â€¢"/>
-            </a:pPr>
-            <a:r>
-              <a:rPr lang="en-US" dirty="0"/>
-              <a:t>My Sessions: drill-down, charts, CSV export, file-level end times.</a:t>
-            </a:r>
-          </a:p>
-          <a:p>
-            <a:pPr marL="342900" indent="-342900">
-              <a:buChar char="â€¢"/>
-            </a:pPr>
-            <a:r>
-              <a:rPr lang="en-US" dirty="0"/>
-              <a:t>Coverage reporting: cross-session view by data end-time (day/week/month).</a:t>
-            </a:r>
-          </a:p>
-        </p:txBody>
-      </p:sp>
-    </p:spTree>
-  </p:cSld>
-  <p:clrMapOvr>
-    <a:masterClrMapping/>
-  </p:clrMapOvr>
-</p:sld>
-</file>
-
-<file path=ppt\slides\slide9.xml><?xml version="1.0" encoding="utf-8"?>
-<p:sld xmlns:a="http://schemas.openxmlformats.org/drawingml/2006/main" xmlns:r="http://schemas.openxmlformats.org/officeDocument/2006/relationships" xmlns:p="http://schemas.openxmlformats.org/presentationml/2006/main">
-  <p:cSld>
-    <p:spTree>
-      <p:nvGrpSpPr>
-        <p:cNvPr id="1" name=""/>
-        <p:cNvGrpSpPr/>
-        <p:nvPr/>
-      </p:nvGrpSpPr>
-      <p:grpSpPr/>
-      <p:sp>
-        <p:nvSpPr>
-          <p:cNvPr id="2" name="Title"/>
-          <p:cNvSpPr>
-            <a:spLocks noGrp="1"/>
-          </p:cNvSpPr>
-          <p:nvPr>
-            <p:ph type="title"/>
-          </p:nvPr>
-        </p:nvSpPr>
-        <p:spPr>
-          <a:xfrm>
-            <a:off x="457200" y="274638"/>
-            <a:ext cx="8229600" cy="1143000"/>
-          </a:xfrm>
-        </p:spPr>
-        <p:txBody>
-          <a:bodyPr/>
-          <a:lstStyle/>
-          <a:p>
-            <a:r>
-              <a:rPr lang="en-US" dirty="0"/>
-              <a:t>Technology at a glance</a:t>
-            </a:r>
-          </a:p>
-        </p:txBody>
-      </p:sp>
-      <p:sp>
-        <p:nvSpPr>
-          <p:cNvPr id="3" name="Content"/>
-          <p:cNvSpPr>
-            <a:spLocks noGrp="1"/>
-          </p:cNvSpPr>
-          <p:nvPr>
-            <p:ph type="body"/>
-          </p:nvPr>
-        </p:nvSpPr>
-        <p:spPr>
-          <a:xfrm>
-            <a:off x="457200" y="1600200"/>
-            <a:ext cx="8229600" cy="4525963"/>
-          </a:xfrm>
-        </p:spPr>
-        <p:txBody>
-          <a:bodyPr/>
-          <a:lstStyle/>
-          <a:p>
-            <a:pPr marL="342900" indent="-342900">
-              <a:buChar char="â€¢"/>
-            </a:pPr>
-            <a:r>
-              <a:rPr lang="en-US" dirty="0"/>
-              <a:t>Frontend: Angular 21, standalone components - maintainable UX, real-time monitoring.</a:t>
-            </a:r>
-          </a:p>
-          <a:p>
-            <a:pPr marL="342900" indent="-342900">
-              <a:buChar char="â€¢"/>
-            </a:pPr>
-            <a:r>
-              <a:rPr lang="en-US" dirty="0"/>
-              <a:t>Backend: Spring Boot 3, Java 21 - schedulers, security, standard stack.</a:t>
-            </a:r>
-          </a:p>
-          <a:p>
-            <a:pPr marL="342900" indent="-342900">
-              <a:buChar char="â€¢"/>
-            </a:pPr>
-            <a:r>
-              <a:rPr lang="en-US" dirty="0"/>
-              <a:t>Data: Oracle RefDB + per-site Oracle pools - fits manufacturing data estate.</a:t>
-            </a:r>
-          </a:p>
-          <a:p>
-            <a:pPr marL="342900" indent="-342900">
-              <a:buChar char="â€¢"/>
-            </a:pPr>
-            <a:r>
-              <a:rPr lang="en-US" dirty="0"/>
-              <a:t>Ops: Prometheus metrics, pool diagnostics, email alerts.</a:t>
+            <a:r>
+              <a:rPr lang="en-US" dirty="0"/>
+              <a:t>ExensioReload turns test-data resend from a tribal, site-by-site exercise into a governed, observable factory capability.</a:t>
+            </a:r>
+          </a:p>
+          <a:p>
+            <a:r>
+              <a:rPr lang="en-US" dirty="0"/>
+              <a:t>Audit, roles, real-time status, and clear date coverage deliver production-grade rigor.</a:t>
+            </a:r>
+          </a:p>
+          <a:p>
+            <a:r>
+              <a:rPr lang="en-US" dirty="0"/>
+              <a:t>The result is lower MTTR, fewer duplicates, and more confidence in downstream manufacturing data.</a:t>
             </a:r>
           </a:p>
         </p:txBody>
